--- a/ゲーム科1年/00_前期/ゲームプログラミングⅠ/16_円と点の当たり判定.pptx
+++ b/ゲーム科1年/00_前期/ゲームプログラミングⅠ/16_円と点の当たり判定.pptx
@@ -269,7 +269,7 @@
           <a:p>
             <a:fld id="{E9CC885B-4903-4D54-9A93-00025F12DED9}" type="datetimeFigureOut">
               <a:rPr kumimoji="1" lang="ja-JP" altLang="en-US" smtClean="0"/>
-              <a:t>2024/9/30</a:t>
+              <a:t>2026/6/4</a:t>
             </a:fld>
             <a:endParaRPr kumimoji="1" lang="ja-JP" altLang="en-US"/>
           </a:p>
@@ -499,7 +499,7 @@
           <a:p>
             <a:fld id="{E9CC885B-4903-4D54-9A93-00025F12DED9}" type="datetimeFigureOut">
               <a:rPr kumimoji="1" lang="ja-JP" altLang="en-US" smtClean="0"/>
-              <a:t>2024/9/30</a:t>
+              <a:t>2026/6/4</a:t>
             </a:fld>
             <a:endParaRPr kumimoji="1" lang="ja-JP" altLang="en-US"/>
           </a:p>
@@ -739,7 +739,7 @@
           <a:p>
             <a:fld id="{E9CC885B-4903-4D54-9A93-00025F12DED9}" type="datetimeFigureOut">
               <a:rPr kumimoji="1" lang="ja-JP" altLang="en-US" smtClean="0"/>
-              <a:t>2024/9/30</a:t>
+              <a:t>2026/6/4</a:t>
             </a:fld>
             <a:endParaRPr kumimoji="1" lang="ja-JP" altLang="en-US"/>
           </a:p>
@@ -969,7 +969,7 @@
           <a:p>
             <a:fld id="{E9CC885B-4903-4D54-9A93-00025F12DED9}" type="datetimeFigureOut">
               <a:rPr kumimoji="1" lang="ja-JP" altLang="en-US" smtClean="0"/>
-              <a:t>2024/9/30</a:t>
+              <a:t>2026/6/4</a:t>
             </a:fld>
             <a:endParaRPr kumimoji="1" lang="ja-JP" altLang="en-US"/>
           </a:p>
@@ -1244,7 +1244,7 @@
           <a:p>
             <a:fld id="{E9CC885B-4903-4D54-9A93-00025F12DED9}" type="datetimeFigureOut">
               <a:rPr kumimoji="1" lang="ja-JP" altLang="en-US" smtClean="0"/>
-              <a:t>2024/9/30</a:t>
+              <a:t>2026/6/4</a:t>
             </a:fld>
             <a:endParaRPr kumimoji="1" lang="ja-JP" altLang="en-US"/>
           </a:p>
@@ -1573,7 +1573,7 @@
           <a:p>
             <a:fld id="{E9CC885B-4903-4D54-9A93-00025F12DED9}" type="datetimeFigureOut">
               <a:rPr kumimoji="1" lang="ja-JP" altLang="en-US" smtClean="0"/>
-              <a:t>2024/9/30</a:t>
+              <a:t>2026/6/4</a:t>
             </a:fld>
             <a:endParaRPr kumimoji="1" lang="ja-JP" altLang="en-US"/>
           </a:p>
@@ -2049,7 +2049,7 @@
           <a:p>
             <a:fld id="{E9CC885B-4903-4D54-9A93-00025F12DED9}" type="datetimeFigureOut">
               <a:rPr kumimoji="1" lang="ja-JP" altLang="en-US" smtClean="0"/>
-              <a:t>2024/9/30</a:t>
+              <a:t>2026/6/4</a:t>
             </a:fld>
             <a:endParaRPr kumimoji="1" lang="ja-JP" altLang="en-US"/>
           </a:p>
@@ -2190,7 +2190,7 @@
           <a:p>
             <a:fld id="{E9CC885B-4903-4D54-9A93-00025F12DED9}" type="datetimeFigureOut">
               <a:rPr kumimoji="1" lang="ja-JP" altLang="en-US" smtClean="0"/>
-              <a:t>2024/9/30</a:t>
+              <a:t>2026/6/4</a:t>
             </a:fld>
             <a:endParaRPr kumimoji="1" lang="ja-JP" altLang="en-US"/>
           </a:p>
@@ -2303,7 +2303,7 @@
           <a:p>
             <a:fld id="{E9CC885B-4903-4D54-9A93-00025F12DED9}" type="datetimeFigureOut">
               <a:rPr kumimoji="1" lang="ja-JP" altLang="en-US" smtClean="0"/>
-              <a:t>2024/9/30</a:t>
+              <a:t>2026/6/4</a:t>
             </a:fld>
             <a:endParaRPr kumimoji="1" lang="ja-JP" altLang="en-US"/>
           </a:p>
@@ -2646,7 +2646,7 @@
           <a:p>
             <a:fld id="{E9CC885B-4903-4D54-9A93-00025F12DED9}" type="datetimeFigureOut">
               <a:rPr kumimoji="1" lang="ja-JP" altLang="en-US" smtClean="0"/>
-              <a:t>2024/9/30</a:t>
+              <a:t>2026/6/4</a:t>
             </a:fld>
             <a:endParaRPr kumimoji="1" lang="ja-JP" altLang="en-US"/>
           </a:p>
@@ -2934,7 +2934,7 @@
           <a:p>
             <a:fld id="{E9CC885B-4903-4D54-9A93-00025F12DED9}" type="datetimeFigureOut">
               <a:rPr kumimoji="1" lang="ja-JP" altLang="en-US" smtClean="0"/>
-              <a:t>2024/9/30</a:t>
+              <a:t>2026/6/4</a:t>
             </a:fld>
             <a:endParaRPr kumimoji="1" lang="ja-JP" altLang="en-US"/>
           </a:p>
@@ -3207,7 +3207,7 @@
           <a:p>
             <a:fld id="{E9CC885B-4903-4D54-9A93-00025F12DED9}" type="datetimeFigureOut">
               <a:rPr kumimoji="1" lang="ja-JP" altLang="en-US" smtClean="0"/>
-              <a:t>2024/9/30</a:t>
+              <a:t>2026/6/4</a:t>
             </a:fld>
             <a:endParaRPr kumimoji="1" lang="ja-JP" altLang="en-US"/>
           </a:p>
@@ -4295,7 +4295,7 @@
         <p:spPr>
           <a:xfrm>
             <a:off x="567542" y="1216429"/>
-            <a:ext cx="6579045" cy="461665"/>
+            <a:ext cx="6680034" cy="461665"/>
           </a:xfrm>
           <a:prstGeom prst="rect">
             <a:avLst/>
@@ -4309,7 +4309,11 @@
           <a:lstStyle/>
           <a:p>
             <a:r>
-              <a:rPr lang="en-US" altLang="ja-JP" sz="2400" dirty="0" err="1"/>
+              <a:rPr lang="en-US" altLang="ja-JP" sz="2400" b="1" dirty="0" err="1">
+                <a:solidFill>
+                  <a:srgbClr val="FF0000"/>
+                </a:solidFill>
+              </a:rPr>
               <a:t>Collision.h</a:t>
             </a:r>
             <a:r>
@@ -4436,7 +4440,7 @@
         <p:spPr>
           <a:xfrm>
             <a:off x="567542" y="1216429"/>
-            <a:ext cx="5069016" cy="461665"/>
+            <a:ext cx="5190845" cy="461665"/>
           </a:xfrm>
           <a:prstGeom prst="rect">
             <a:avLst/>
@@ -4450,7 +4454,11 @@
           <a:lstStyle/>
           <a:p>
             <a:r>
-              <a:rPr lang="en-US" altLang="ja-JP" sz="2400" dirty="0"/>
+              <a:rPr lang="en-US" altLang="ja-JP" sz="2400" b="1" dirty="0">
+                <a:solidFill>
+                  <a:srgbClr val="FF0000"/>
+                </a:solidFill>
+              </a:rPr>
               <a:t>Collision.cpp</a:t>
             </a:r>
             <a:r>
